--- a/NetWorks Prezentáció.pptx
+++ b/NetWorks Prezentáció.pptx
@@ -15,8 +15,8 @@
     <p:sldId id="261" r:id="rId9"/>
     <p:sldId id="262" r:id="rId10"/>
     <p:sldId id="265" r:id="rId11"/>
-    <p:sldId id="266" r:id="rId12"/>
-    <p:sldId id="271" r:id="rId13"/>
+    <p:sldId id="271" r:id="rId12"/>
+    <p:sldId id="266" r:id="rId13"/>
     <p:sldId id="268" r:id="rId14"/>
   </p:sldIdLst>
   <p:sldSz cx="12192000" cy="6858000"/>
@@ -181,7 +181,7 @@
           <a:noFill/>
           <a:extLst>
             <a:ext uri="{909E8E84-426E-40dd-AFC4-6F175D3DCCD1}">
-              <a14:hiddenFill xmlns:a14="http://schemas.microsoft.com/office/drawing/2010/main" xmlns="">
+              <a14:hiddenFill xmlns="" xmlns:a14="http://schemas.microsoft.com/office/drawing/2010/main">
                 <a:solidFill>
                   <a:srgbClr val="FFFFFF"/>
                 </a:solidFill>
@@ -240,7 +240,7 @@
             </a:ln>
             <a:extLst>
               <a:ext uri="{91240B29-F687-4f45-9708-019B960494DF}">
-                <a14:hiddenLine xmlns:a14="http://schemas.microsoft.com/office/drawing/2010/main" xmlns="" w="9525">
+                <a14:hiddenLine xmlns="" xmlns:a14="http://schemas.microsoft.com/office/drawing/2010/main" w="9525">
                   <a:solidFill>
                     <a:srgbClr val="000000"/>
                   </a:solidFill>
@@ -337,7 +337,7 @@
             </a:ln>
             <a:extLst>
               <a:ext uri="{91240B29-F687-4f45-9708-019B960494DF}">
-                <a14:hiddenLine xmlns:a14="http://schemas.microsoft.com/office/drawing/2010/main" xmlns="" w="9525">
+                <a14:hiddenLine xmlns="" xmlns:a14="http://schemas.microsoft.com/office/drawing/2010/main" w="9525">
                   <a:solidFill>
                     <a:srgbClr val="000000"/>
                   </a:solidFill>
@@ -434,7 +434,7 @@
             </a:ln>
             <a:extLst>
               <a:ext uri="{91240B29-F687-4f45-9708-019B960494DF}">
-                <a14:hiddenLine xmlns:a14="http://schemas.microsoft.com/office/drawing/2010/main" xmlns="" w="9525">
+                <a14:hiddenLine xmlns="" xmlns:a14="http://schemas.microsoft.com/office/drawing/2010/main" w="9525">
                   <a:solidFill>
                     <a:srgbClr val="000000"/>
                   </a:solidFill>
@@ -475,7 +475,7 @@
             </a:ln>
             <a:extLst>
               <a:ext uri="{91240B29-F687-4f45-9708-019B960494DF}">
-                <a14:hiddenLine xmlns:a14="http://schemas.microsoft.com/office/drawing/2010/main" xmlns="" w="9525">
+                <a14:hiddenLine xmlns="" xmlns:a14="http://schemas.microsoft.com/office/drawing/2010/main" w="9525">
                   <a:solidFill>
                     <a:srgbClr val="000000"/>
                   </a:solidFill>
@@ -572,7 +572,7 @@
             </a:ln>
             <a:extLst>
               <a:ext uri="{91240B29-F687-4f45-9708-019B960494DF}">
-                <a14:hiddenLine xmlns:a14="http://schemas.microsoft.com/office/drawing/2010/main" xmlns="" w="9525">
+                <a14:hiddenLine xmlns="" xmlns:a14="http://schemas.microsoft.com/office/drawing/2010/main" w="9525">
                   <a:solidFill>
                     <a:srgbClr val="000000"/>
                   </a:solidFill>
@@ -641,7 +641,7 @@
             </a:ln>
             <a:extLst>
               <a:ext uri="{91240B29-F687-4f45-9708-019B960494DF}">
-                <a14:hiddenLine xmlns:a14="http://schemas.microsoft.com/office/drawing/2010/main" xmlns="" w="9525">
+                <a14:hiddenLine xmlns="" xmlns:a14="http://schemas.microsoft.com/office/drawing/2010/main" w="9525">
                   <a:solidFill>
                     <a:srgbClr val="000000"/>
                   </a:solidFill>
@@ -710,7 +710,7 @@
             </a:ln>
             <a:extLst>
               <a:ext uri="{91240B29-F687-4f45-9708-019B960494DF}">
-                <a14:hiddenLine xmlns:a14="http://schemas.microsoft.com/office/drawing/2010/main" xmlns="" w="9525">
+                <a14:hiddenLine xmlns="" xmlns:a14="http://schemas.microsoft.com/office/drawing/2010/main" w="9525">
                   <a:solidFill>
                     <a:srgbClr val="000000"/>
                   </a:solidFill>
@@ -807,7 +807,7 @@
             </a:ln>
             <a:extLst>
               <a:ext uri="{91240B29-F687-4f45-9708-019B960494DF}">
-                <a14:hiddenLine xmlns:a14="http://schemas.microsoft.com/office/drawing/2010/main" xmlns="" w="9525">
+                <a14:hiddenLine xmlns="" xmlns:a14="http://schemas.microsoft.com/office/drawing/2010/main" w="9525">
                   <a:solidFill>
                     <a:srgbClr val="000000"/>
                   </a:solidFill>
@@ -876,7 +876,7 @@
             </a:ln>
             <a:extLst>
               <a:ext uri="{91240B29-F687-4f45-9708-019B960494DF}">
-                <a14:hiddenLine xmlns:a14="http://schemas.microsoft.com/office/drawing/2010/main" xmlns="" w="9525">
+                <a14:hiddenLine xmlns="" xmlns:a14="http://schemas.microsoft.com/office/drawing/2010/main" w="9525">
                   <a:solidFill>
                     <a:srgbClr val="000000"/>
                   </a:solidFill>
@@ -945,7 +945,7 @@
             </a:ln>
             <a:extLst>
               <a:ext uri="{91240B29-F687-4f45-9708-019B960494DF}">
-                <a14:hiddenLine xmlns:a14="http://schemas.microsoft.com/office/drawing/2010/main" xmlns="" w="9525">
+                <a14:hiddenLine xmlns="" xmlns:a14="http://schemas.microsoft.com/office/drawing/2010/main" w="9525">
                   <a:solidFill>
                     <a:srgbClr val="000000"/>
                   </a:solidFill>
@@ -1042,7 +1042,7 @@
             </a:ln>
             <a:extLst>
               <a:ext uri="{91240B29-F687-4f45-9708-019B960494DF}">
-                <a14:hiddenLine xmlns:a14="http://schemas.microsoft.com/office/drawing/2010/main" xmlns="" w="9525">
+                <a14:hiddenLine xmlns="" xmlns:a14="http://schemas.microsoft.com/office/drawing/2010/main" w="9525">
                   <a:solidFill>
                     <a:srgbClr val="000000"/>
                   </a:solidFill>
@@ -1139,7 +1139,7 @@
             </a:ln>
             <a:extLst>
               <a:ext uri="{91240B29-F687-4f45-9708-019B960494DF}">
-                <a14:hiddenLine xmlns:a14="http://schemas.microsoft.com/office/drawing/2010/main" xmlns="" w="9525">
+                <a14:hiddenLine xmlns="" xmlns:a14="http://schemas.microsoft.com/office/drawing/2010/main" w="9525">
                   <a:solidFill>
                     <a:srgbClr val="000000"/>
                   </a:solidFill>
@@ -1208,7 +1208,7 @@
             </a:ln>
             <a:extLst>
               <a:ext uri="{91240B29-F687-4f45-9708-019B960494DF}">
-                <a14:hiddenLine xmlns:a14="http://schemas.microsoft.com/office/drawing/2010/main" xmlns="" w="9525">
+                <a14:hiddenLine xmlns="" xmlns:a14="http://schemas.microsoft.com/office/drawing/2010/main" w="9525">
                   <a:solidFill>
                     <a:srgbClr val="000000"/>
                   </a:solidFill>
@@ -1325,7 +1325,7 @@
             </a:ln>
             <a:extLst>
               <a:ext uri="{91240B29-F687-4f45-9708-019B960494DF}">
-                <a14:hiddenLine xmlns:a14="http://schemas.microsoft.com/office/drawing/2010/main" xmlns="" w="9525">
+                <a14:hiddenLine xmlns="" xmlns:a14="http://schemas.microsoft.com/office/drawing/2010/main" w="9525">
                   <a:solidFill>
                     <a:srgbClr val="000000"/>
                   </a:solidFill>
@@ -1394,7 +1394,7 @@
             </a:ln>
             <a:extLst>
               <a:ext uri="{91240B29-F687-4f45-9708-019B960494DF}">
-                <a14:hiddenLine xmlns:a14="http://schemas.microsoft.com/office/drawing/2010/main" xmlns="" w="9525">
+                <a14:hiddenLine xmlns="" xmlns:a14="http://schemas.microsoft.com/office/drawing/2010/main" w="9525">
                   <a:solidFill>
                     <a:srgbClr val="000000"/>
                   </a:solidFill>
@@ -1491,7 +1491,7 @@
             </a:ln>
             <a:extLst>
               <a:ext uri="{91240B29-F687-4f45-9708-019B960494DF}">
-                <a14:hiddenLine xmlns:a14="http://schemas.microsoft.com/office/drawing/2010/main" xmlns="" w="9525">
+                <a14:hiddenLine xmlns="" xmlns:a14="http://schemas.microsoft.com/office/drawing/2010/main" w="9525">
                   <a:solidFill>
                     <a:srgbClr val="000000"/>
                   </a:solidFill>
@@ -1588,7 +1588,7 @@
             </a:ln>
             <a:extLst>
               <a:ext uri="{91240B29-F687-4f45-9708-019B960494DF}">
-                <a14:hiddenLine xmlns:a14="http://schemas.microsoft.com/office/drawing/2010/main" xmlns="" w="9525">
+                <a14:hiddenLine xmlns="" xmlns:a14="http://schemas.microsoft.com/office/drawing/2010/main" w="9525">
                   <a:solidFill>
                     <a:srgbClr val="000000"/>
                   </a:solidFill>
@@ -1657,7 +1657,7 @@
             </a:ln>
             <a:extLst>
               <a:ext uri="{91240B29-F687-4f45-9708-019B960494DF}">
-                <a14:hiddenLine xmlns:a14="http://schemas.microsoft.com/office/drawing/2010/main" xmlns="" w="9525">
+                <a14:hiddenLine xmlns="" xmlns:a14="http://schemas.microsoft.com/office/drawing/2010/main" w="9525">
                   <a:solidFill>
                     <a:srgbClr val="000000"/>
                   </a:solidFill>
@@ -1754,7 +1754,7 @@
             </a:ln>
             <a:extLst>
               <a:ext uri="{91240B29-F687-4f45-9708-019B960494DF}">
-                <a14:hiddenLine xmlns:a14="http://schemas.microsoft.com/office/drawing/2010/main" xmlns="" w="9525">
+                <a14:hiddenLine xmlns="" xmlns:a14="http://schemas.microsoft.com/office/drawing/2010/main" w="9525">
                   <a:solidFill>
                     <a:srgbClr val="000000"/>
                   </a:solidFill>
@@ -1851,7 +1851,7 @@
             </a:ln>
             <a:extLst>
               <a:ext uri="{91240B29-F687-4f45-9708-019B960494DF}">
-                <a14:hiddenLine xmlns:a14="http://schemas.microsoft.com/office/drawing/2010/main" xmlns="" w="9525">
+                <a14:hiddenLine xmlns="" xmlns:a14="http://schemas.microsoft.com/office/drawing/2010/main" w="9525">
                   <a:solidFill>
                     <a:srgbClr val="000000"/>
                   </a:solidFill>
@@ -1914,7 +1914,7 @@
             </a:ln>
             <a:extLst>
               <a:ext uri="{91240B29-F687-4f45-9708-019B960494DF}">
-                <a14:hiddenLine xmlns:a14="http://schemas.microsoft.com/office/drawing/2010/main" xmlns="" w="9525">
+                <a14:hiddenLine xmlns="" xmlns:a14="http://schemas.microsoft.com/office/drawing/2010/main" w="9525">
                   <a:solidFill>
                     <a:srgbClr val="000000"/>
                   </a:solidFill>
@@ -2011,7 +2011,7 @@
             </a:ln>
             <a:extLst>
               <a:ext uri="{91240B29-F687-4f45-9708-019B960494DF}">
-                <a14:hiddenLine xmlns:a14="http://schemas.microsoft.com/office/drawing/2010/main" xmlns="" w="9525">
+                <a14:hiddenLine xmlns="" xmlns:a14="http://schemas.microsoft.com/office/drawing/2010/main" w="9525">
                   <a:solidFill>
                     <a:srgbClr val="000000"/>
                   </a:solidFill>
@@ -2074,7 +2074,7 @@
             </a:ln>
             <a:extLst>
               <a:ext uri="{91240B29-F687-4f45-9708-019B960494DF}">
-                <a14:hiddenLine xmlns:a14="http://schemas.microsoft.com/office/drawing/2010/main" xmlns="" w="9525">
+                <a14:hiddenLine xmlns="" xmlns:a14="http://schemas.microsoft.com/office/drawing/2010/main" w="9525">
                   <a:solidFill>
                     <a:srgbClr val="000000"/>
                   </a:solidFill>
@@ -2171,7 +2171,7 @@
             </a:ln>
             <a:extLst>
               <a:ext uri="{91240B29-F687-4f45-9708-019B960494DF}">
-                <a14:hiddenLine xmlns:a14="http://schemas.microsoft.com/office/drawing/2010/main" xmlns="" w="9525">
+                <a14:hiddenLine xmlns="" xmlns:a14="http://schemas.microsoft.com/office/drawing/2010/main" w="9525">
                   <a:solidFill>
                     <a:srgbClr val="000000"/>
                   </a:solidFill>
@@ -2246,7 +2246,7 @@
             </a:ln>
             <a:extLst>
               <a:ext uri="{91240B29-F687-4f45-9708-019B960494DF}">
-                <a14:hiddenLine xmlns:a14="http://schemas.microsoft.com/office/drawing/2010/main" xmlns="" w="9525">
+                <a14:hiddenLine xmlns="" xmlns:a14="http://schemas.microsoft.com/office/drawing/2010/main" w="9525">
                   <a:solidFill>
                     <a:srgbClr val="000000"/>
                   </a:solidFill>
@@ -2343,7 +2343,7 @@
             </a:ln>
             <a:extLst>
               <a:ext uri="{91240B29-F687-4f45-9708-019B960494DF}">
-                <a14:hiddenLine xmlns:a14="http://schemas.microsoft.com/office/drawing/2010/main" xmlns="" w="9525">
+                <a14:hiddenLine xmlns="" xmlns:a14="http://schemas.microsoft.com/office/drawing/2010/main" w="9525">
                   <a:solidFill>
                     <a:srgbClr val="000000"/>
                   </a:solidFill>
@@ -2418,7 +2418,7 @@
             </a:ln>
             <a:extLst>
               <a:ext uri="{91240B29-F687-4f45-9708-019B960494DF}">
-                <a14:hiddenLine xmlns:a14="http://schemas.microsoft.com/office/drawing/2010/main" xmlns="" w="9525">
+                <a14:hiddenLine xmlns="" xmlns:a14="http://schemas.microsoft.com/office/drawing/2010/main" w="9525">
                   <a:solidFill>
                     <a:srgbClr val="000000"/>
                   </a:solidFill>
@@ -2515,7 +2515,7 @@
             </a:ln>
             <a:extLst>
               <a:ext uri="{91240B29-F687-4f45-9708-019B960494DF}">
-                <a14:hiddenLine xmlns:a14="http://schemas.microsoft.com/office/drawing/2010/main" xmlns="" w="9525">
+                <a14:hiddenLine xmlns="" xmlns:a14="http://schemas.microsoft.com/office/drawing/2010/main" w="9525">
                   <a:solidFill>
                     <a:srgbClr val="000000"/>
                   </a:solidFill>
@@ -2556,7 +2556,7 @@
             </a:ln>
             <a:extLst>
               <a:ext uri="{91240B29-F687-4f45-9708-019B960494DF}">
-                <a14:hiddenLine xmlns:a14="http://schemas.microsoft.com/office/drawing/2010/main" xmlns="" w="9525">
+                <a14:hiddenLine xmlns="" xmlns:a14="http://schemas.microsoft.com/office/drawing/2010/main" w="9525">
                   <a:solidFill>
                     <a:srgbClr val="000000"/>
                   </a:solidFill>
@@ -2653,7 +2653,7 @@
             </a:ln>
             <a:extLst>
               <a:ext uri="{91240B29-F687-4f45-9708-019B960494DF}">
-                <a14:hiddenLine xmlns:a14="http://schemas.microsoft.com/office/drawing/2010/main" xmlns="" w="9525">
+                <a14:hiddenLine xmlns="" xmlns:a14="http://schemas.microsoft.com/office/drawing/2010/main" w="9525">
                   <a:solidFill>
                     <a:srgbClr val="000000"/>
                   </a:solidFill>
@@ -2722,7 +2722,7 @@
             </a:ln>
             <a:extLst>
               <a:ext uri="{91240B29-F687-4f45-9708-019B960494DF}">
-                <a14:hiddenLine xmlns:a14="http://schemas.microsoft.com/office/drawing/2010/main" xmlns="" w="9525">
+                <a14:hiddenLine xmlns="" xmlns:a14="http://schemas.microsoft.com/office/drawing/2010/main" w="9525">
                   <a:solidFill>
                     <a:srgbClr val="000000"/>
                   </a:solidFill>
@@ -2791,7 +2791,7 @@
             </a:ln>
             <a:extLst>
               <a:ext uri="{91240B29-F687-4f45-9708-019B960494DF}">
-                <a14:hiddenLine xmlns:a14="http://schemas.microsoft.com/office/drawing/2010/main" xmlns="" w="9525">
+                <a14:hiddenLine xmlns="" xmlns:a14="http://schemas.microsoft.com/office/drawing/2010/main" w="9525">
                   <a:solidFill>
                     <a:srgbClr val="000000"/>
                   </a:solidFill>
@@ -2888,7 +2888,7 @@
             </a:ln>
             <a:extLst>
               <a:ext uri="{91240B29-F687-4f45-9708-019B960494DF}">
-                <a14:hiddenLine xmlns:a14="http://schemas.microsoft.com/office/drawing/2010/main" xmlns="" w="9525">
+                <a14:hiddenLine xmlns="" xmlns:a14="http://schemas.microsoft.com/office/drawing/2010/main" w="9525">
                   <a:solidFill>
                     <a:srgbClr val="000000"/>
                   </a:solidFill>
@@ -2963,7 +2963,7 @@
             </a:ln>
             <a:extLst>
               <a:ext uri="{91240B29-F687-4f45-9708-019B960494DF}">
-                <a14:hiddenLine xmlns:a14="http://schemas.microsoft.com/office/drawing/2010/main" xmlns="" w="9525">
+                <a14:hiddenLine xmlns="" xmlns:a14="http://schemas.microsoft.com/office/drawing/2010/main" w="9525">
                   <a:solidFill>
                     <a:srgbClr val="000000"/>
                   </a:solidFill>
@@ -3032,7 +3032,7 @@
             </a:ln>
             <a:extLst>
               <a:ext uri="{91240B29-F687-4f45-9708-019B960494DF}">
-                <a14:hiddenLine xmlns:a14="http://schemas.microsoft.com/office/drawing/2010/main" xmlns="" w="9525">
+                <a14:hiddenLine xmlns="" xmlns:a14="http://schemas.microsoft.com/office/drawing/2010/main" w="9525">
                   <a:solidFill>
                     <a:srgbClr val="000000"/>
                   </a:solidFill>
@@ -3129,7 +3129,7 @@
             </a:ln>
             <a:extLst>
               <a:ext uri="{91240B29-F687-4f45-9708-019B960494DF}">
-                <a14:hiddenLine xmlns:a14="http://schemas.microsoft.com/office/drawing/2010/main" xmlns="" w="9525">
+                <a14:hiddenLine xmlns="" xmlns:a14="http://schemas.microsoft.com/office/drawing/2010/main" w="9525">
                   <a:solidFill>
                     <a:srgbClr val="000000"/>
                   </a:solidFill>
@@ -3198,7 +3198,7 @@
             </a:ln>
             <a:extLst>
               <a:ext uri="{91240B29-F687-4f45-9708-019B960494DF}">
-                <a14:hiddenLine xmlns:a14="http://schemas.microsoft.com/office/drawing/2010/main" xmlns="" w="9525">
+                <a14:hiddenLine xmlns="" xmlns:a14="http://schemas.microsoft.com/office/drawing/2010/main" w="9525">
                   <a:solidFill>
                     <a:srgbClr val="000000"/>
                   </a:solidFill>
@@ -3295,7 +3295,7 @@
             </a:ln>
             <a:extLst>
               <a:ext uri="{91240B29-F687-4f45-9708-019B960494DF}">
-                <a14:hiddenLine xmlns:a14="http://schemas.microsoft.com/office/drawing/2010/main" xmlns="" w="9525">
+                <a14:hiddenLine xmlns="" xmlns:a14="http://schemas.microsoft.com/office/drawing/2010/main" w="9525">
                   <a:solidFill>
                     <a:srgbClr val="000000"/>
                   </a:solidFill>
@@ -3364,7 +3364,7 @@
             </a:ln>
             <a:extLst>
               <a:ext uri="{91240B29-F687-4f45-9708-019B960494DF}">
-                <a14:hiddenLine xmlns:a14="http://schemas.microsoft.com/office/drawing/2010/main" xmlns="" w="9525">
+                <a14:hiddenLine xmlns="" xmlns:a14="http://schemas.microsoft.com/office/drawing/2010/main" w="9525">
                   <a:solidFill>
                     <a:srgbClr val="000000"/>
                   </a:solidFill>
@@ -3461,7 +3461,7 @@
             </a:ln>
             <a:extLst>
               <a:ext uri="{91240B29-F687-4f45-9708-019B960494DF}">
-                <a14:hiddenLine xmlns:a14="http://schemas.microsoft.com/office/drawing/2010/main" xmlns="" w="9525">
+                <a14:hiddenLine xmlns="" xmlns:a14="http://schemas.microsoft.com/office/drawing/2010/main" w="9525">
                   <a:solidFill>
                     <a:srgbClr val="000000"/>
                   </a:solidFill>
@@ -3502,7 +3502,7 @@
             </a:ln>
             <a:extLst>
               <a:ext uri="{91240B29-F687-4f45-9708-019B960494DF}">
-                <a14:hiddenLine xmlns:a14="http://schemas.microsoft.com/office/drawing/2010/main" xmlns="" w="9525">
+                <a14:hiddenLine xmlns="" xmlns:a14="http://schemas.microsoft.com/office/drawing/2010/main" w="9525">
                   <a:solidFill>
                     <a:srgbClr val="000000"/>
                   </a:solidFill>
@@ -3574,7 +3574,7 @@
             </a:ln>
             <a:extLst>
               <a:ext uri="{91240B29-F687-4f45-9708-019B960494DF}">
-                <a14:hiddenLine xmlns:a14="http://schemas.microsoft.com/office/drawing/2010/main" xmlns="" w="9525">
+                <a14:hiddenLine xmlns="" xmlns:a14="http://schemas.microsoft.com/office/drawing/2010/main" w="9525">
                   <a:solidFill>
                     <a:srgbClr val="000000"/>
                   </a:solidFill>
@@ -3671,7 +3671,7 @@
             </a:ln>
             <a:extLst>
               <a:ext uri="{91240B29-F687-4f45-9708-019B960494DF}">
-                <a14:hiddenLine xmlns:a14="http://schemas.microsoft.com/office/drawing/2010/main" xmlns="" w="9525">
+                <a14:hiddenLine xmlns="" xmlns:a14="http://schemas.microsoft.com/office/drawing/2010/main" w="9525">
                   <a:solidFill>
                     <a:srgbClr val="000000"/>
                   </a:solidFill>
@@ -3740,7 +3740,7 @@
             </a:ln>
             <a:extLst>
               <a:ext uri="{91240B29-F687-4f45-9708-019B960494DF}">
-                <a14:hiddenLine xmlns:a14="http://schemas.microsoft.com/office/drawing/2010/main" xmlns="" w="9525">
+                <a14:hiddenLine xmlns="" xmlns:a14="http://schemas.microsoft.com/office/drawing/2010/main" w="9525">
                   <a:solidFill>
                     <a:srgbClr val="000000"/>
                   </a:solidFill>
@@ -3837,7 +3837,7 @@
             </a:ln>
             <a:extLst>
               <a:ext uri="{91240B29-F687-4f45-9708-019B960494DF}">
-                <a14:hiddenLine xmlns:a14="http://schemas.microsoft.com/office/drawing/2010/main" xmlns="" w="9525">
+                <a14:hiddenLine xmlns="" xmlns:a14="http://schemas.microsoft.com/office/drawing/2010/main" w="9525">
                   <a:solidFill>
                     <a:srgbClr val="000000"/>
                   </a:solidFill>
@@ -3934,7 +3934,7 @@
             </a:ln>
             <a:extLst>
               <a:ext uri="{91240B29-F687-4f45-9708-019B960494DF}">
-                <a14:hiddenLine xmlns:a14="http://schemas.microsoft.com/office/drawing/2010/main" xmlns="" w="9525">
+                <a14:hiddenLine xmlns="" xmlns:a14="http://schemas.microsoft.com/office/drawing/2010/main" w="9525">
                   <a:solidFill>
                     <a:srgbClr val="000000"/>
                   </a:solidFill>
@@ -4006,7 +4006,7 @@
             </a:ln>
             <a:extLst>
               <a:ext uri="{91240B29-F687-4f45-9708-019B960494DF}">
-                <a14:hiddenLine xmlns:a14="http://schemas.microsoft.com/office/drawing/2010/main" xmlns="" w="9525">
+                <a14:hiddenLine xmlns="" xmlns:a14="http://schemas.microsoft.com/office/drawing/2010/main" w="9525">
                   <a:solidFill>
                     <a:srgbClr val="000000"/>
                   </a:solidFill>
@@ -4075,7 +4075,7 @@
             </a:ln>
             <a:extLst>
               <a:ext uri="{91240B29-F687-4f45-9708-019B960494DF}">
-                <a14:hiddenLine xmlns:a14="http://schemas.microsoft.com/office/drawing/2010/main" xmlns="" w="9525">
+                <a14:hiddenLine xmlns="" xmlns:a14="http://schemas.microsoft.com/office/drawing/2010/main" w="9525">
                   <a:solidFill>
                     <a:srgbClr val="000000"/>
                   </a:solidFill>
@@ -4172,7 +4172,7 @@
             </a:ln>
             <a:extLst>
               <a:ext uri="{91240B29-F687-4f45-9708-019B960494DF}">
-                <a14:hiddenLine xmlns:a14="http://schemas.microsoft.com/office/drawing/2010/main" xmlns="" w="9525">
+                <a14:hiddenLine xmlns="" xmlns:a14="http://schemas.microsoft.com/office/drawing/2010/main" w="9525">
                   <a:solidFill>
                     <a:srgbClr val="000000"/>
                   </a:solidFill>
@@ -4269,7 +4269,7 @@
             </a:ln>
             <a:extLst>
               <a:ext uri="{91240B29-F687-4f45-9708-019B960494DF}">
-                <a14:hiddenLine xmlns:a14="http://schemas.microsoft.com/office/drawing/2010/main" xmlns="" w="9525">
+                <a14:hiddenLine xmlns="" xmlns:a14="http://schemas.microsoft.com/office/drawing/2010/main" w="9525">
                   <a:solidFill>
                     <a:srgbClr val="000000"/>
                   </a:solidFill>
@@ -4338,7 +4338,7 @@
             </a:ln>
             <a:extLst>
               <a:ext uri="{91240B29-F687-4f45-9708-019B960494DF}">
-                <a14:hiddenLine xmlns:a14="http://schemas.microsoft.com/office/drawing/2010/main" xmlns="" w="9525">
+                <a14:hiddenLine xmlns="" xmlns:a14="http://schemas.microsoft.com/office/drawing/2010/main" w="9525">
                   <a:solidFill>
                     <a:srgbClr val="000000"/>
                   </a:solidFill>
@@ -4465,7 +4465,7 @@
             </a:ln>
             <a:extLst>
               <a:ext uri="{91240B29-F687-4f45-9708-019B960494DF}">
-                <a14:hiddenLine xmlns:a14="http://schemas.microsoft.com/office/drawing/2010/main" xmlns="" w="9525">
+                <a14:hiddenLine xmlns="" xmlns:a14="http://schemas.microsoft.com/office/drawing/2010/main" w="9525">
                   <a:solidFill>
                     <a:srgbClr val="000000"/>
                   </a:solidFill>
@@ -4540,7 +4540,7 @@
             </a:ln>
             <a:extLst>
               <a:ext uri="{91240B29-F687-4f45-9708-019B960494DF}">
-                <a14:hiddenLine xmlns:a14="http://schemas.microsoft.com/office/drawing/2010/main" xmlns="" w="9525">
+                <a14:hiddenLine xmlns="" xmlns:a14="http://schemas.microsoft.com/office/drawing/2010/main" w="9525">
                   <a:solidFill>
                     <a:srgbClr val="000000"/>
                   </a:solidFill>
@@ -4637,7 +4637,7 @@
             </a:ln>
             <a:extLst>
               <a:ext uri="{91240B29-F687-4f45-9708-019B960494DF}">
-                <a14:hiddenLine xmlns:a14="http://schemas.microsoft.com/office/drawing/2010/main" xmlns="" w="9525">
+                <a14:hiddenLine xmlns="" xmlns:a14="http://schemas.microsoft.com/office/drawing/2010/main" w="9525">
                   <a:solidFill>
                     <a:srgbClr val="000000"/>
                   </a:solidFill>
@@ -4784,7 +4784,7 @@
           <a:p>
             <a:fld id="{BBF345EF-3DD6-4656-8E60-F4ED4EB688B0}" type="datetimeFigureOut">
               <a:rPr lang="hu-HU" smtClean="0"/>
-              <a:t>2026. 02. 22.</a:t>
+              <a:t>2026. 02. 28.</a:t>
             </a:fld>
             <a:endParaRPr lang="hu-HU"/>
           </a:p>
@@ -5051,7 +5051,7 @@
           <a:p>
             <a:fld id="{BBF345EF-3DD6-4656-8E60-F4ED4EB688B0}" type="datetimeFigureOut">
               <a:rPr lang="hu-HU" smtClean="0"/>
-              <a:t>2026. 02. 22.</a:t>
+              <a:t>2026. 02. 28.</a:t>
             </a:fld>
             <a:endParaRPr lang="hu-HU"/>
           </a:p>
@@ -5247,7 +5247,7 @@
           <a:p>
             <a:fld id="{BBF345EF-3DD6-4656-8E60-F4ED4EB688B0}" type="datetimeFigureOut">
               <a:rPr lang="hu-HU" smtClean="0"/>
-              <a:t>2026. 02. 22.</a:t>
+              <a:t>2026. 02. 28.</a:t>
             </a:fld>
             <a:endParaRPr lang="hu-HU"/>
           </a:p>
@@ -5510,7 +5510,7 @@
           <a:p>
             <a:fld id="{BBF345EF-3DD6-4656-8E60-F4ED4EB688B0}" type="datetimeFigureOut">
               <a:rPr lang="hu-HU" smtClean="0"/>
-              <a:t>2026. 02. 22.</a:t>
+              <a:t>2026. 02. 28.</a:t>
             </a:fld>
             <a:endParaRPr lang="hu-HU"/>
           </a:p>
@@ -5944,7 +5944,7 @@
           <a:p>
             <a:fld id="{BBF345EF-3DD6-4656-8E60-F4ED4EB688B0}" type="datetimeFigureOut">
               <a:rPr lang="hu-HU" smtClean="0"/>
-              <a:t>2026. 02. 22.</a:t>
+              <a:t>2026. 02. 28.</a:t>
             </a:fld>
             <a:endParaRPr lang="hu-HU"/>
           </a:p>
@@ -6490,7 +6490,7 @@
           <a:p>
             <a:fld id="{BBF345EF-3DD6-4656-8E60-F4ED4EB688B0}" type="datetimeFigureOut">
               <a:rPr lang="hu-HU" smtClean="0"/>
-              <a:t>2026. 02. 22.</a:t>
+              <a:t>2026. 02. 28.</a:t>
             </a:fld>
             <a:endParaRPr lang="hu-HU"/>
           </a:p>
@@ -7210,7 +7210,7 @@
           <a:p>
             <a:fld id="{BBF345EF-3DD6-4656-8E60-F4ED4EB688B0}" type="datetimeFigureOut">
               <a:rPr lang="hu-HU" smtClean="0"/>
-              <a:t>2026. 02. 22.</a:t>
+              <a:t>2026. 02. 28.</a:t>
             </a:fld>
             <a:endParaRPr lang="hu-HU"/>
           </a:p>
@@ -7380,7 +7380,7 @@
           <a:p>
             <a:fld id="{BBF345EF-3DD6-4656-8E60-F4ED4EB688B0}" type="datetimeFigureOut">
               <a:rPr lang="hu-HU" smtClean="0"/>
-              <a:t>2026. 02. 22.</a:t>
+              <a:t>2026. 02. 28.</a:t>
             </a:fld>
             <a:endParaRPr lang="hu-HU"/>
           </a:p>
@@ -7560,7 +7560,7 @@
           <a:p>
             <a:fld id="{BBF345EF-3DD6-4656-8E60-F4ED4EB688B0}" type="datetimeFigureOut">
               <a:rPr lang="hu-HU" smtClean="0"/>
-              <a:t>2026. 02. 22.</a:t>
+              <a:t>2026. 02. 28.</a:t>
             </a:fld>
             <a:endParaRPr lang="hu-HU"/>
           </a:p>
@@ -7730,7 +7730,7 @@
           <a:p>
             <a:fld id="{BBF345EF-3DD6-4656-8E60-F4ED4EB688B0}" type="datetimeFigureOut">
               <a:rPr lang="hu-HU" smtClean="0"/>
-              <a:t>2026. 02. 22.</a:t>
+              <a:t>2026. 02. 28.</a:t>
             </a:fld>
             <a:endParaRPr lang="hu-HU"/>
           </a:p>
@@ -7980,7 +7980,7 @@
           <a:p>
             <a:fld id="{BBF345EF-3DD6-4656-8E60-F4ED4EB688B0}" type="datetimeFigureOut">
               <a:rPr lang="hu-HU" smtClean="0"/>
-              <a:t>2026. 02. 22.</a:t>
+              <a:t>2026. 02. 28.</a:t>
             </a:fld>
             <a:endParaRPr lang="hu-HU"/>
           </a:p>
@@ -8212,7 +8212,7 @@
           <a:p>
             <a:fld id="{BBF345EF-3DD6-4656-8E60-F4ED4EB688B0}" type="datetimeFigureOut">
               <a:rPr lang="hu-HU" smtClean="0"/>
-              <a:t>2026. 02. 22.</a:t>
+              <a:t>2026. 02. 28.</a:t>
             </a:fld>
             <a:endParaRPr lang="hu-HU"/>
           </a:p>
@@ -8593,7 +8593,7 @@
           <a:p>
             <a:fld id="{BBF345EF-3DD6-4656-8E60-F4ED4EB688B0}" type="datetimeFigureOut">
               <a:rPr lang="hu-HU" smtClean="0"/>
-              <a:t>2026. 02. 22.</a:t>
+              <a:t>2026. 02. 28.</a:t>
             </a:fld>
             <a:endParaRPr lang="hu-HU"/>
           </a:p>
@@ -8711,7 +8711,7 @@
           <a:p>
             <a:fld id="{BBF345EF-3DD6-4656-8E60-F4ED4EB688B0}" type="datetimeFigureOut">
               <a:rPr lang="hu-HU" smtClean="0"/>
-              <a:t>2026. 02. 22.</a:t>
+              <a:t>2026. 02. 28.</a:t>
             </a:fld>
             <a:endParaRPr lang="hu-HU"/>
           </a:p>
@@ -8806,7 +8806,7 @@
           <a:p>
             <a:fld id="{BBF345EF-3DD6-4656-8E60-F4ED4EB688B0}" type="datetimeFigureOut">
               <a:rPr lang="hu-HU" smtClean="0"/>
-              <a:t>2026. 02. 22.</a:t>
+              <a:t>2026. 02. 28.</a:t>
             </a:fld>
             <a:endParaRPr lang="hu-HU"/>
           </a:p>
@@ -9055,7 +9055,7 @@
           <a:p>
             <a:fld id="{BBF345EF-3DD6-4656-8E60-F4ED4EB688B0}" type="datetimeFigureOut">
               <a:rPr lang="hu-HU" smtClean="0"/>
-              <a:t>2026. 02. 22.</a:t>
+              <a:t>2026. 02. 28.</a:t>
             </a:fld>
             <a:endParaRPr lang="hu-HU"/>
           </a:p>
@@ -9335,7 +9335,7 @@
           <a:p>
             <a:fld id="{BBF345EF-3DD6-4656-8E60-F4ED4EB688B0}" type="datetimeFigureOut">
               <a:rPr lang="hu-HU" smtClean="0"/>
-              <a:t>2026. 02. 22.</a:t>
+              <a:t>2026. 02. 28.</a:t>
             </a:fld>
             <a:endParaRPr lang="hu-HU"/>
           </a:p>
@@ -9458,7 +9458,7 @@
           <a:noFill/>
           <a:extLst>
             <a:ext uri="{909E8E84-426E-40dd-AFC4-6F175D3DCCD1}">
-              <a14:hiddenFill xmlns:a14="http://schemas.microsoft.com/office/drawing/2010/main" xmlns="">
+              <a14:hiddenFill xmlns="" xmlns:a14="http://schemas.microsoft.com/office/drawing/2010/main">
                 <a:solidFill>
                   <a:srgbClr val="FFFFFF"/>
                 </a:solidFill>
@@ -9532,7 +9532,7 @@
               </a:ln>
               <a:extLst>
                 <a:ext uri="{91240B29-F687-4f45-9708-019B960494DF}">
-                  <a14:hiddenLine xmlns:a14="http://schemas.microsoft.com/office/drawing/2010/main" xmlns="" w="9525">
+                  <a14:hiddenLine xmlns="" xmlns:a14="http://schemas.microsoft.com/office/drawing/2010/main" w="9525">
                     <a:solidFill>
                       <a:srgbClr val="000000"/>
                     </a:solidFill>
@@ -9629,7 +9629,7 @@
               </a:ln>
               <a:extLst>
                 <a:ext uri="{91240B29-F687-4f45-9708-019B960494DF}">
-                  <a14:hiddenLine xmlns:a14="http://schemas.microsoft.com/office/drawing/2010/main" xmlns="" w="9525">
+                  <a14:hiddenLine xmlns="" xmlns:a14="http://schemas.microsoft.com/office/drawing/2010/main" w="9525">
                     <a:solidFill>
                       <a:srgbClr val="000000"/>
                     </a:solidFill>
@@ -9726,7 +9726,7 @@
               </a:ln>
               <a:extLst>
                 <a:ext uri="{91240B29-F687-4f45-9708-019B960494DF}">
-                  <a14:hiddenLine xmlns:a14="http://schemas.microsoft.com/office/drawing/2010/main" xmlns="" w="9525">
+                  <a14:hiddenLine xmlns="" xmlns:a14="http://schemas.microsoft.com/office/drawing/2010/main" w="9525">
                     <a:solidFill>
                       <a:srgbClr val="000000"/>
                     </a:solidFill>
@@ -9795,7 +9795,7 @@
               </a:ln>
               <a:extLst>
                 <a:ext uri="{91240B29-F687-4f45-9708-019B960494DF}">
-                  <a14:hiddenLine xmlns:a14="http://schemas.microsoft.com/office/drawing/2010/main" xmlns="" w="9525">
+                  <a14:hiddenLine xmlns="" xmlns:a14="http://schemas.microsoft.com/office/drawing/2010/main" w="9525">
                     <a:solidFill>
                       <a:srgbClr val="000000"/>
                     </a:solidFill>
@@ -9892,7 +9892,7 @@
               </a:ln>
               <a:extLst>
                 <a:ext uri="{91240B29-F687-4f45-9708-019B960494DF}">
-                  <a14:hiddenLine xmlns:a14="http://schemas.microsoft.com/office/drawing/2010/main" xmlns="" w="9525">
+                  <a14:hiddenLine xmlns="" xmlns:a14="http://schemas.microsoft.com/office/drawing/2010/main" w="9525">
                     <a:solidFill>
                       <a:srgbClr val="000000"/>
                     </a:solidFill>
@@ -9961,7 +9961,7 @@
               </a:ln>
               <a:extLst>
                 <a:ext uri="{91240B29-F687-4f45-9708-019B960494DF}">
-                  <a14:hiddenLine xmlns:a14="http://schemas.microsoft.com/office/drawing/2010/main" xmlns="" w="9525">
+                  <a14:hiddenLine xmlns="" xmlns:a14="http://schemas.microsoft.com/office/drawing/2010/main" w="9525">
                     <a:solidFill>
                       <a:srgbClr val="000000"/>
                     </a:solidFill>
@@ -10030,7 +10030,7 @@
               </a:ln>
               <a:extLst>
                 <a:ext uri="{91240B29-F687-4f45-9708-019B960494DF}">
-                  <a14:hiddenLine xmlns:a14="http://schemas.microsoft.com/office/drawing/2010/main" xmlns="" w="9525">
+                  <a14:hiddenLine xmlns="" xmlns:a14="http://schemas.microsoft.com/office/drawing/2010/main" w="9525">
                     <a:solidFill>
                       <a:srgbClr val="000000"/>
                     </a:solidFill>
@@ -10127,7 +10127,7 @@
               </a:ln>
               <a:extLst>
                 <a:ext uri="{91240B29-F687-4f45-9708-019B960494DF}">
-                  <a14:hiddenLine xmlns:a14="http://schemas.microsoft.com/office/drawing/2010/main" xmlns="" w="9525">
+                  <a14:hiddenLine xmlns="" xmlns:a14="http://schemas.microsoft.com/office/drawing/2010/main" w="9525">
                     <a:solidFill>
                       <a:srgbClr val="000000"/>
                     </a:solidFill>
@@ -10224,7 +10224,7 @@
               </a:ln>
               <a:extLst>
                 <a:ext uri="{91240B29-F687-4f45-9708-019B960494DF}">
-                  <a14:hiddenLine xmlns:a14="http://schemas.microsoft.com/office/drawing/2010/main" xmlns="" w="9525">
+                  <a14:hiddenLine xmlns="" xmlns:a14="http://schemas.microsoft.com/office/drawing/2010/main" w="9525">
                     <a:solidFill>
                       <a:srgbClr val="000000"/>
                     </a:solidFill>
@@ -10293,7 +10293,7 @@
               </a:ln>
               <a:extLst>
                 <a:ext uri="{91240B29-F687-4f45-9708-019B960494DF}">
-                  <a14:hiddenLine xmlns:a14="http://schemas.microsoft.com/office/drawing/2010/main" xmlns="" w="9525">
+                  <a14:hiddenLine xmlns="" xmlns:a14="http://schemas.microsoft.com/office/drawing/2010/main" w="9525">
                     <a:solidFill>
                       <a:srgbClr val="000000"/>
                     </a:solidFill>
@@ -10410,7 +10410,7 @@
               </a:ln>
               <a:extLst>
                 <a:ext uri="{91240B29-F687-4f45-9708-019B960494DF}">
-                  <a14:hiddenLine xmlns:a14="http://schemas.microsoft.com/office/drawing/2010/main" xmlns="" w="9525">
+                  <a14:hiddenLine xmlns="" xmlns:a14="http://schemas.microsoft.com/office/drawing/2010/main" w="9525">
                     <a:solidFill>
                       <a:srgbClr val="000000"/>
                     </a:solidFill>
@@ -10508,7 +10508,7 @@
               </a:ln>
               <a:extLst>
                 <a:ext uri="{91240B29-F687-4f45-9708-019B960494DF}">
-                  <a14:hiddenLine xmlns:a14="http://schemas.microsoft.com/office/drawing/2010/main" xmlns="" w="9525">
+                  <a14:hiddenLine xmlns="" xmlns:a14="http://schemas.microsoft.com/office/drawing/2010/main" w="9525">
                     <a:solidFill>
                       <a:srgbClr val="000000"/>
                     </a:solidFill>
@@ -10577,7 +10577,7 @@
               </a:ln>
               <a:extLst>
                 <a:ext uri="{91240B29-F687-4f45-9708-019B960494DF}">
-                  <a14:hiddenLine xmlns:a14="http://schemas.microsoft.com/office/drawing/2010/main" xmlns="" w="9525">
+                  <a14:hiddenLine xmlns="" xmlns:a14="http://schemas.microsoft.com/office/drawing/2010/main" w="9525">
                     <a:solidFill>
                       <a:srgbClr val="000000"/>
                     </a:solidFill>
@@ -10646,7 +10646,7 @@
               </a:ln>
               <a:extLst>
                 <a:ext uri="{91240B29-F687-4f45-9708-019B960494DF}">
-                  <a14:hiddenLine xmlns:a14="http://schemas.microsoft.com/office/drawing/2010/main" xmlns="" w="9525">
+                  <a14:hiddenLine xmlns="" xmlns:a14="http://schemas.microsoft.com/office/drawing/2010/main" w="9525">
                     <a:solidFill>
                       <a:srgbClr val="000000"/>
                     </a:solidFill>
@@ -10743,7 +10743,7 @@
               </a:ln>
               <a:extLst>
                 <a:ext uri="{91240B29-F687-4f45-9708-019B960494DF}">
-                  <a14:hiddenLine xmlns:a14="http://schemas.microsoft.com/office/drawing/2010/main" xmlns="" w="9525">
+                  <a14:hiddenLine xmlns="" xmlns:a14="http://schemas.microsoft.com/office/drawing/2010/main" w="9525">
                     <a:solidFill>
                       <a:srgbClr val="000000"/>
                     </a:solidFill>
@@ -10784,7 +10784,7 @@
               </a:ln>
               <a:extLst>
                 <a:ext uri="{91240B29-F687-4f45-9708-019B960494DF}">
-                  <a14:hiddenLine xmlns:a14="http://schemas.microsoft.com/office/drawing/2010/main" xmlns="" w="9525">
+                  <a14:hiddenLine xmlns="" xmlns:a14="http://schemas.microsoft.com/office/drawing/2010/main" w="9525">
                     <a:solidFill>
                       <a:srgbClr val="000000"/>
                     </a:solidFill>
@@ -10856,7 +10856,7 @@
               </a:ln>
               <a:extLst>
                 <a:ext uri="{91240B29-F687-4f45-9708-019B960494DF}">
-                  <a14:hiddenLine xmlns:a14="http://schemas.microsoft.com/office/drawing/2010/main" xmlns="" w="9525">
+                  <a14:hiddenLine xmlns="" xmlns:a14="http://schemas.microsoft.com/office/drawing/2010/main" w="9525">
                     <a:solidFill>
                       <a:srgbClr val="000000"/>
                     </a:solidFill>
@@ -10953,7 +10953,7 @@
               </a:ln>
               <a:extLst>
                 <a:ext uri="{91240B29-F687-4f45-9708-019B960494DF}">
-                  <a14:hiddenLine xmlns:a14="http://schemas.microsoft.com/office/drawing/2010/main" xmlns="" w="9525">
+                  <a14:hiddenLine xmlns="" xmlns:a14="http://schemas.microsoft.com/office/drawing/2010/main" w="9525">
                     <a:solidFill>
                       <a:srgbClr val="000000"/>
                     </a:solidFill>
@@ -11022,7 +11022,7 @@
               </a:ln>
               <a:extLst>
                 <a:ext uri="{91240B29-F687-4f45-9708-019B960494DF}">
-                  <a14:hiddenLine xmlns:a14="http://schemas.microsoft.com/office/drawing/2010/main" xmlns="" w="9525">
+                  <a14:hiddenLine xmlns="" xmlns:a14="http://schemas.microsoft.com/office/drawing/2010/main" w="9525">
                     <a:solidFill>
                       <a:srgbClr val="000000"/>
                     </a:solidFill>
@@ -11119,7 +11119,7 @@
               </a:ln>
               <a:extLst>
                 <a:ext uri="{91240B29-F687-4f45-9708-019B960494DF}">
-                  <a14:hiddenLine xmlns:a14="http://schemas.microsoft.com/office/drawing/2010/main" xmlns="" w="9525">
+                  <a14:hiddenLine xmlns="" xmlns:a14="http://schemas.microsoft.com/office/drawing/2010/main" w="9525">
                     <a:solidFill>
                       <a:srgbClr val="000000"/>
                     </a:solidFill>
@@ -11191,7 +11191,7 @@
               </a:ln>
               <a:extLst>
                 <a:ext uri="{91240B29-F687-4f45-9708-019B960494DF}">
-                  <a14:hiddenLine xmlns:a14="http://schemas.microsoft.com/office/drawing/2010/main" xmlns="" w="9525">
+                  <a14:hiddenLine xmlns="" xmlns:a14="http://schemas.microsoft.com/office/drawing/2010/main" w="9525">
                     <a:solidFill>
                       <a:srgbClr val="000000"/>
                     </a:solidFill>
@@ -11260,7 +11260,7 @@
               </a:ln>
               <a:extLst>
                 <a:ext uri="{91240B29-F687-4f45-9708-019B960494DF}">
-                  <a14:hiddenLine xmlns:a14="http://schemas.microsoft.com/office/drawing/2010/main" xmlns="" w="9525">
+                  <a14:hiddenLine xmlns="" xmlns:a14="http://schemas.microsoft.com/office/drawing/2010/main" w="9525">
                     <a:solidFill>
                       <a:srgbClr val="000000"/>
                     </a:solidFill>
@@ -11357,7 +11357,7 @@
               </a:ln>
               <a:extLst>
                 <a:ext uri="{91240B29-F687-4f45-9708-019B960494DF}">
-                  <a14:hiddenLine xmlns:a14="http://schemas.microsoft.com/office/drawing/2010/main" xmlns="" w="9525">
+                  <a14:hiddenLine xmlns="" xmlns:a14="http://schemas.microsoft.com/office/drawing/2010/main" w="9525">
                     <a:solidFill>
                       <a:srgbClr val="000000"/>
                     </a:solidFill>
@@ -11454,7 +11454,7 @@
               </a:ln>
               <a:extLst>
                 <a:ext uri="{91240B29-F687-4f45-9708-019B960494DF}">
-                  <a14:hiddenLine xmlns:a14="http://schemas.microsoft.com/office/drawing/2010/main" xmlns="" w="9525">
+                  <a14:hiddenLine xmlns="" xmlns:a14="http://schemas.microsoft.com/office/drawing/2010/main" w="9525">
                     <a:solidFill>
                       <a:srgbClr val="000000"/>
                     </a:solidFill>
@@ -11526,7 +11526,7 @@
               </a:ln>
               <a:extLst>
                 <a:ext uri="{91240B29-F687-4f45-9708-019B960494DF}">
-                  <a14:hiddenLine xmlns:a14="http://schemas.microsoft.com/office/drawing/2010/main" xmlns="" w="9525">
+                  <a14:hiddenLine xmlns="" xmlns:a14="http://schemas.microsoft.com/office/drawing/2010/main" w="9525">
                     <a:solidFill>
                       <a:srgbClr val="000000"/>
                     </a:solidFill>
@@ -11653,7 +11653,7 @@
               </a:ln>
               <a:extLst>
                 <a:ext uri="{91240B29-F687-4f45-9708-019B960494DF}">
-                  <a14:hiddenLine xmlns:a14="http://schemas.microsoft.com/office/drawing/2010/main" xmlns="" w="9525">
+                  <a14:hiddenLine xmlns="" xmlns:a14="http://schemas.microsoft.com/office/drawing/2010/main" w="9525">
                     <a:solidFill>
                       <a:srgbClr val="000000"/>
                     </a:solidFill>
@@ -11741,7 +11741,7 @@
               </a:ln>
               <a:extLst>
                 <a:ext uri="{91240B29-F687-4f45-9708-019B960494DF}">
-                  <a14:hiddenLine xmlns:a14="http://schemas.microsoft.com/office/drawing/2010/main" xmlns="" w="9525">
+                  <a14:hiddenLine xmlns="" xmlns:a14="http://schemas.microsoft.com/office/drawing/2010/main" w="9525">
                     <a:solidFill>
                       <a:srgbClr val="000000"/>
                     </a:solidFill>
@@ -11863,7 +11863,7 @@
               </a:ln>
               <a:extLst>
                 <a:ext uri="{91240B29-F687-4f45-9708-019B960494DF}">
-                  <a14:hiddenLine xmlns:a14="http://schemas.microsoft.com/office/drawing/2010/main" xmlns="" w="9525">
+                  <a14:hiddenLine xmlns="" xmlns:a14="http://schemas.microsoft.com/office/drawing/2010/main" w="9525">
                     <a:solidFill>
                       <a:srgbClr val="000000"/>
                     </a:solidFill>
@@ -11960,7 +11960,7 @@
               </a:ln>
               <a:extLst>
                 <a:ext uri="{91240B29-F687-4f45-9708-019B960494DF}">
-                  <a14:hiddenLine xmlns:a14="http://schemas.microsoft.com/office/drawing/2010/main" xmlns="" w="9525">
+                  <a14:hiddenLine xmlns="" xmlns:a14="http://schemas.microsoft.com/office/drawing/2010/main" w="9525">
                     <a:solidFill>
                       <a:srgbClr val="000000"/>
                     </a:solidFill>
@@ -12032,7 +12032,7 @@
               </a:ln>
               <a:extLst>
                 <a:ext uri="{91240B29-F687-4f45-9708-019B960494DF}">
-                  <a14:hiddenLine xmlns:a14="http://schemas.microsoft.com/office/drawing/2010/main" xmlns="" w="9525">
+                  <a14:hiddenLine xmlns="" xmlns:a14="http://schemas.microsoft.com/office/drawing/2010/main" w="9525">
                     <a:solidFill>
                       <a:srgbClr val="000000"/>
                     </a:solidFill>
@@ -12129,7 +12129,7 @@
               </a:ln>
               <a:extLst>
                 <a:ext uri="{91240B29-F687-4f45-9708-019B960494DF}">
-                  <a14:hiddenLine xmlns:a14="http://schemas.microsoft.com/office/drawing/2010/main" xmlns="" w="9525">
+                  <a14:hiddenLine xmlns="" xmlns:a14="http://schemas.microsoft.com/office/drawing/2010/main" w="9525">
                     <a:solidFill>
                       <a:srgbClr val="000000"/>
                     </a:solidFill>
@@ -12204,7 +12204,7 @@
               </a:ln>
               <a:extLst>
                 <a:ext uri="{91240B29-F687-4f45-9708-019B960494DF}">
-                  <a14:hiddenLine xmlns:a14="http://schemas.microsoft.com/office/drawing/2010/main" xmlns="" w="9525">
+                  <a14:hiddenLine xmlns="" xmlns:a14="http://schemas.microsoft.com/office/drawing/2010/main" w="9525">
                     <a:solidFill>
                       <a:srgbClr val="000000"/>
                     </a:solidFill>
@@ -12301,7 +12301,7 @@
               </a:ln>
               <a:extLst>
                 <a:ext uri="{91240B29-F687-4f45-9708-019B960494DF}">
-                  <a14:hiddenLine xmlns:a14="http://schemas.microsoft.com/office/drawing/2010/main" xmlns="" w="9525">
+                  <a14:hiddenLine xmlns="" xmlns:a14="http://schemas.microsoft.com/office/drawing/2010/main" w="9525">
                     <a:solidFill>
                       <a:srgbClr val="000000"/>
                     </a:solidFill>
@@ -12376,7 +12376,7 @@
               </a:ln>
               <a:extLst>
                 <a:ext uri="{91240B29-F687-4f45-9708-019B960494DF}">
-                  <a14:hiddenLine xmlns:a14="http://schemas.microsoft.com/office/drawing/2010/main" xmlns="" w="9525">
+                  <a14:hiddenLine xmlns="" xmlns:a14="http://schemas.microsoft.com/office/drawing/2010/main" w="9525">
                     <a:solidFill>
                       <a:srgbClr val="000000"/>
                     </a:solidFill>
@@ -12473,7 +12473,7 @@
               </a:ln>
               <a:extLst>
                 <a:ext uri="{91240B29-F687-4f45-9708-019B960494DF}">
-                  <a14:hiddenLine xmlns:a14="http://schemas.microsoft.com/office/drawing/2010/main" xmlns="" w="9525">
+                  <a14:hiddenLine xmlns="" xmlns:a14="http://schemas.microsoft.com/office/drawing/2010/main" w="9525">
                     <a:solidFill>
                       <a:srgbClr val="000000"/>
                     </a:solidFill>
@@ -12514,7 +12514,7 @@
               </a:ln>
               <a:extLst>
                 <a:ext uri="{91240B29-F687-4f45-9708-019B960494DF}">
-                  <a14:hiddenLine xmlns:a14="http://schemas.microsoft.com/office/drawing/2010/main" xmlns="" w="9525">
+                  <a14:hiddenLine xmlns="" xmlns:a14="http://schemas.microsoft.com/office/drawing/2010/main" w="9525">
                     <a:solidFill>
                       <a:srgbClr val="000000"/>
                     </a:solidFill>
@@ -12661,7 +12661,7 @@
           <a:p>
             <a:fld id="{BBF345EF-3DD6-4656-8E60-F4ED4EB688B0}" type="datetimeFigureOut">
               <a:rPr lang="hu-HU" smtClean="0"/>
-              <a:t>2026. 02. 22.</a:t>
+              <a:t>2026. 02. 28.</a:t>
             </a:fld>
             <a:endParaRPr lang="hu-HU"/>
           </a:p>
@@ -13500,6 +13500,135 @@
           <p:cNvPr id="2" name="Cím 1">
             <a:extLst>
               <a:ext uri="{FF2B5EF4-FFF2-40B4-BE49-F238E27FC236}">
+                <a16:creationId xmlns:a16="http://schemas.microsoft.com/office/drawing/2014/main" id="{90FECE65-15C3-9449-4EE6-1C660069C33E}"/>
+              </a:ext>
+            </a:extLst>
+          </p:cNvPr>
+          <p:cNvSpPr>
+            <a:spLocks noGrp="1"/>
+          </p:cNvSpPr>
+          <p:nvPr>
+            <p:ph type="title"/>
+          </p:nvPr>
+        </p:nvSpPr>
+        <p:spPr/>
+        <p:txBody>
+          <a:bodyPr/>
+          <a:lstStyle/>
+          <a:p>
+            <a:r>
+              <a:rPr lang="hu-HU" dirty="0"/>
+              <a:t>Logolt órák</a:t>
+            </a:r>
+          </a:p>
+        </p:txBody>
+      </p:sp>
+      <p:pic>
+        <p:nvPicPr>
+          <p:cNvPr id="5" name="Tartalom helye 4">
+            <a:extLst>
+              <a:ext uri="{FF2B5EF4-FFF2-40B4-BE49-F238E27FC236}">
+                <a16:creationId xmlns:a16="http://schemas.microsoft.com/office/drawing/2014/main" id="{94F01EC3-7AEA-295E-9F15-81E0F9A33B11}"/>
+              </a:ext>
+            </a:extLst>
+          </p:cNvPr>
+          <p:cNvPicPr>
+            <a:picLocks noGrp="1" noChangeAspect="1"/>
+          </p:cNvPicPr>
+          <p:nvPr>
+            <p:ph idx="1"/>
+          </p:nvPr>
+        </p:nvPicPr>
+        <p:blipFill>
+          <a:blip r:embed="rId2">
+            <a:extLst>
+              <a:ext uri="{28A0092B-C50C-407E-A947-70E740481C1C}">
+                <a14:useLocalDpi xmlns:a14="http://schemas.microsoft.com/office/drawing/2010/main" val="0"/>
+              </a:ext>
+            </a:extLst>
+          </a:blip>
+          <a:stretch>
+            <a:fillRect/>
+          </a:stretch>
+        </p:blipFill>
+        <p:spPr>
+          <a:xfrm>
+            <a:off x="-1" y="3618000"/>
+            <a:ext cx="6067058" cy="3240000"/>
+          </a:xfrm>
+        </p:spPr>
+      </p:pic>
+      <p:pic>
+        <p:nvPicPr>
+          <p:cNvPr id="7" name="Kép 6">
+            <a:extLst>
+              <a:ext uri="{FF2B5EF4-FFF2-40B4-BE49-F238E27FC236}">
+                <a16:creationId xmlns:a16="http://schemas.microsoft.com/office/drawing/2014/main" id="{D6BE8A00-4173-B629-8A9B-4AA2557750E3}"/>
+              </a:ext>
+            </a:extLst>
+          </p:cNvPr>
+          <p:cNvPicPr>
+            <a:picLocks noChangeAspect="1"/>
+          </p:cNvPicPr>
+          <p:nvPr/>
+        </p:nvPicPr>
+        <p:blipFill>
+          <a:blip r:embed="rId3">
+            <a:extLst>
+              <a:ext uri="{28A0092B-C50C-407E-A947-70E740481C1C}">
+                <a14:useLocalDpi xmlns:a14="http://schemas.microsoft.com/office/drawing/2010/main" val="0"/>
+              </a:ext>
+            </a:extLst>
+          </a:blip>
+          <a:stretch>
+            <a:fillRect/>
+          </a:stretch>
+        </p:blipFill>
+        <p:spPr>
+          <a:xfrm>
+            <a:off x="6124944" y="3618000"/>
+            <a:ext cx="6060146" cy="3240000"/>
+          </a:xfrm>
+          <a:prstGeom prst="rect">
+            <a:avLst/>
+          </a:prstGeom>
+        </p:spPr>
+      </p:pic>
+    </p:spTree>
+    <p:extLst>
+      <p:ext uri="{BB962C8B-B14F-4D97-AF65-F5344CB8AC3E}">
+        <p14:creationId xmlns:p14="http://schemas.microsoft.com/office/powerpoint/2010/main" val="3416999692"/>
+      </p:ext>
+    </p:extLst>
+  </p:cSld>
+  <p:clrMapOvr>
+    <a:masterClrMapping/>
+  </p:clrMapOvr>
+</p:sld>
+</file>
+
+<file path=ppt/slides/slide12.xml><?xml version="1.0" encoding="utf-8"?>
+<p:sld xmlns:a="http://schemas.openxmlformats.org/drawingml/2006/main" xmlns:r="http://schemas.openxmlformats.org/officeDocument/2006/relationships" xmlns:p="http://schemas.openxmlformats.org/presentationml/2006/main">
+  <p:cSld>
+    <p:spTree>
+      <p:nvGrpSpPr>
+        <p:cNvPr id="1" name=""/>
+        <p:cNvGrpSpPr/>
+        <p:nvPr/>
+      </p:nvGrpSpPr>
+      <p:grpSpPr>
+        <a:xfrm>
+          <a:off x="0" y="0"/>
+          <a:ext cx="0" cy="0"/>
+          <a:chOff x="0" y="0"/>
+          <a:chExt cx="0" cy="0"/>
+        </a:xfrm>
+      </p:grpSpPr>
+      <p:sp>
+        <p:nvSpPr>
+          <p:cNvPr id="2" name="Cím 1">
+            <a:extLst>
+              <a:ext uri="{FF2B5EF4-FFF2-40B4-BE49-F238E27FC236}">
                 <a16:creationId xmlns:a16="http://schemas.microsoft.com/office/drawing/2014/main" id="{25E3ABED-656C-530C-1C3E-7252CEE4F2C0}"/>
               </a:ext>
             </a:extLst>
@@ -13643,135 +13772,6 @@
 </p:sld>
 </file>
 
-<file path=ppt/slides/slide12.xml><?xml version="1.0" encoding="utf-8"?>
-<p:sld xmlns:a="http://schemas.openxmlformats.org/drawingml/2006/main" xmlns:r="http://schemas.openxmlformats.org/officeDocument/2006/relationships" xmlns:p="http://schemas.openxmlformats.org/presentationml/2006/main">
-  <p:cSld>
-    <p:spTree>
-      <p:nvGrpSpPr>
-        <p:cNvPr id="1" name=""/>
-        <p:cNvGrpSpPr/>
-        <p:nvPr/>
-      </p:nvGrpSpPr>
-      <p:grpSpPr>
-        <a:xfrm>
-          <a:off x="0" y="0"/>
-          <a:ext cx="0" cy="0"/>
-          <a:chOff x="0" y="0"/>
-          <a:chExt cx="0" cy="0"/>
-        </a:xfrm>
-      </p:grpSpPr>
-      <p:sp>
-        <p:nvSpPr>
-          <p:cNvPr id="2" name="Cím 1">
-            <a:extLst>
-              <a:ext uri="{FF2B5EF4-FFF2-40B4-BE49-F238E27FC236}">
-                <a16:creationId xmlns:a16="http://schemas.microsoft.com/office/drawing/2014/main" id="{90FECE65-15C3-9449-4EE6-1C660069C33E}"/>
-              </a:ext>
-            </a:extLst>
-          </p:cNvPr>
-          <p:cNvSpPr>
-            <a:spLocks noGrp="1"/>
-          </p:cNvSpPr>
-          <p:nvPr>
-            <p:ph type="title"/>
-          </p:nvPr>
-        </p:nvSpPr>
-        <p:spPr/>
-        <p:txBody>
-          <a:bodyPr/>
-          <a:lstStyle/>
-          <a:p>
-            <a:r>
-              <a:rPr lang="hu-HU" dirty="0"/>
-              <a:t>Logolt órák</a:t>
-            </a:r>
-          </a:p>
-        </p:txBody>
-      </p:sp>
-      <p:pic>
-        <p:nvPicPr>
-          <p:cNvPr id="5" name="Tartalom helye 4">
-            <a:extLst>
-              <a:ext uri="{FF2B5EF4-FFF2-40B4-BE49-F238E27FC236}">
-                <a16:creationId xmlns:a16="http://schemas.microsoft.com/office/drawing/2014/main" id="{94F01EC3-7AEA-295E-9F15-81E0F9A33B11}"/>
-              </a:ext>
-            </a:extLst>
-          </p:cNvPr>
-          <p:cNvPicPr>
-            <a:picLocks noGrp="1" noChangeAspect="1"/>
-          </p:cNvPicPr>
-          <p:nvPr>
-            <p:ph idx="1"/>
-          </p:nvPr>
-        </p:nvPicPr>
-        <p:blipFill>
-          <a:blip r:embed="rId2">
-            <a:extLst>
-              <a:ext uri="{28A0092B-C50C-407E-A947-70E740481C1C}">
-                <a14:useLocalDpi xmlns:a14="http://schemas.microsoft.com/office/drawing/2010/main" val="0"/>
-              </a:ext>
-            </a:extLst>
-          </a:blip>
-          <a:stretch>
-            <a:fillRect/>
-          </a:stretch>
-        </p:blipFill>
-        <p:spPr>
-          <a:xfrm>
-            <a:off x="-1" y="3618000"/>
-            <a:ext cx="6067058" cy="3240000"/>
-          </a:xfrm>
-        </p:spPr>
-      </p:pic>
-      <p:pic>
-        <p:nvPicPr>
-          <p:cNvPr id="7" name="Kép 6">
-            <a:extLst>
-              <a:ext uri="{FF2B5EF4-FFF2-40B4-BE49-F238E27FC236}">
-                <a16:creationId xmlns:a16="http://schemas.microsoft.com/office/drawing/2014/main" id="{D6BE8A00-4173-B629-8A9B-4AA2557750E3}"/>
-              </a:ext>
-            </a:extLst>
-          </p:cNvPr>
-          <p:cNvPicPr>
-            <a:picLocks noChangeAspect="1"/>
-          </p:cNvPicPr>
-          <p:nvPr/>
-        </p:nvPicPr>
-        <p:blipFill>
-          <a:blip r:embed="rId3">
-            <a:extLst>
-              <a:ext uri="{28A0092B-C50C-407E-A947-70E740481C1C}">
-                <a14:useLocalDpi xmlns:a14="http://schemas.microsoft.com/office/drawing/2010/main" val="0"/>
-              </a:ext>
-            </a:extLst>
-          </a:blip>
-          <a:stretch>
-            <a:fillRect/>
-          </a:stretch>
-        </p:blipFill>
-        <p:spPr>
-          <a:xfrm>
-            <a:off x="6124944" y="3618000"/>
-            <a:ext cx="6060146" cy="3240000"/>
-          </a:xfrm>
-          <a:prstGeom prst="rect">
-            <a:avLst/>
-          </a:prstGeom>
-        </p:spPr>
-      </p:pic>
-    </p:spTree>
-    <p:extLst>
-      <p:ext uri="{BB962C8B-B14F-4D97-AF65-F5344CB8AC3E}">
-        <p14:creationId xmlns:p14="http://schemas.microsoft.com/office/powerpoint/2010/main" val="3416999692"/>
-      </p:ext>
-    </p:extLst>
-  </p:cSld>
-  <p:clrMapOvr>
-    <a:masterClrMapping/>
-  </p:clrMapOvr>
-</p:sld>
-</file>
-
 <file path=ppt/slides/slide13.xml><?xml version="1.0" encoding="utf-8"?>
 <p:sld xmlns:a="http://schemas.openxmlformats.org/drawingml/2006/main" xmlns:r="http://schemas.openxmlformats.org/officeDocument/2006/relationships" xmlns:p="http://schemas.openxmlformats.org/presentationml/2006/main">
   <p:cSld>
@@ -14593,7 +14593,7 @@
             </a:pPr>
             <a:r>
               <a:rPr lang="hu-HU" dirty="0"/>
-              <a:t>Statikus és Dinamikus címfordítás (NAT,PAT)</a:t>
+              <a:t>Dinamikus címfordítás (NAT)</a:t>
             </a:r>
           </a:p>
           <a:p>
@@ -14869,6 +14869,15 @@
             <a:r>
               <a:rPr lang="hu-HU" dirty="0"/>
               <a:t>IPv4</a:t>
+            </a:r>
+          </a:p>
+          <a:p>
+            <a:pPr marL="0" indent="0">
+              <a:buNone/>
+            </a:pPr>
+            <a:r>
+              <a:rPr lang="hu-HU" dirty="0"/>
+              <a:t>Statikus Címfordítás (NAT)</a:t>
             </a:r>
           </a:p>
           <a:p>
